--- a/Slides/Ders 5.0 Design 1NF.pptx
+++ b/Slides/Ders 5.0 Design 1NF.pptx
@@ -216,7 +216,7 @@
           <a:p>
             <a:fld id="{DD4244C5-5D67-C540-97C4-F007CFC432EF}" type="datetimeFigureOut">
               <a:rPr lang="tr-TR" smtClean="0"/>
-              <a:t>14.04.2024</a:t>
+              <a:t>14.04.2025</a:t>
             </a:fld>
             <a:endParaRPr lang="tr-TR"/>
           </a:p>
@@ -615,7 +615,7 @@
           <a:p>
             <a:fld id="{26396F4E-1D0B-3F44-AA0F-A3430AE5742F}" type="datetimeFigureOut">
               <a:rPr lang="tr-TR" smtClean="0"/>
-              <a:t>14.04.2024</a:t>
+              <a:t>14.04.2025</a:t>
             </a:fld>
             <a:endParaRPr lang="tr-TR"/>
           </a:p>
@@ -785,7 +785,7 @@
           <a:p>
             <a:fld id="{26396F4E-1D0B-3F44-AA0F-A3430AE5742F}" type="datetimeFigureOut">
               <a:rPr lang="tr-TR" smtClean="0"/>
-              <a:t>14.04.2024</a:t>
+              <a:t>14.04.2025</a:t>
             </a:fld>
             <a:endParaRPr lang="tr-TR"/>
           </a:p>
@@ -965,7 +965,7 @@
           <a:p>
             <a:fld id="{26396F4E-1D0B-3F44-AA0F-A3430AE5742F}" type="datetimeFigureOut">
               <a:rPr lang="tr-TR" smtClean="0"/>
-              <a:t>14.04.2024</a:t>
+              <a:t>14.04.2025</a:t>
             </a:fld>
             <a:endParaRPr lang="tr-TR"/>
           </a:p>
@@ -1135,7 +1135,7 @@
           <a:p>
             <a:fld id="{26396F4E-1D0B-3F44-AA0F-A3430AE5742F}" type="datetimeFigureOut">
               <a:rPr lang="tr-TR" smtClean="0"/>
-              <a:t>14.04.2024</a:t>
+              <a:t>14.04.2025</a:t>
             </a:fld>
             <a:endParaRPr lang="tr-TR"/>
           </a:p>
@@ -1379,7 +1379,7 @@
           <a:p>
             <a:fld id="{26396F4E-1D0B-3F44-AA0F-A3430AE5742F}" type="datetimeFigureOut">
               <a:rPr lang="tr-TR" smtClean="0"/>
-              <a:t>14.04.2024</a:t>
+              <a:t>14.04.2025</a:t>
             </a:fld>
             <a:endParaRPr lang="tr-TR"/>
           </a:p>
@@ -1611,7 +1611,7 @@
           <a:p>
             <a:fld id="{26396F4E-1D0B-3F44-AA0F-A3430AE5742F}" type="datetimeFigureOut">
               <a:rPr lang="tr-TR" smtClean="0"/>
-              <a:t>14.04.2024</a:t>
+              <a:t>14.04.2025</a:t>
             </a:fld>
             <a:endParaRPr lang="tr-TR"/>
           </a:p>
@@ -1978,7 +1978,7 @@
           <a:p>
             <a:fld id="{26396F4E-1D0B-3F44-AA0F-A3430AE5742F}" type="datetimeFigureOut">
               <a:rPr lang="tr-TR" smtClean="0"/>
-              <a:t>14.04.2024</a:t>
+              <a:t>14.04.2025</a:t>
             </a:fld>
             <a:endParaRPr lang="tr-TR"/>
           </a:p>
@@ -2096,7 +2096,7 @@
           <a:p>
             <a:fld id="{26396F4E-1D0B-3F44-AA0F-A3430AE5742F}" type="datetimeFigureOut">
               <a:rPr lang="tr-TR" smtClean="0"/>
-              <a:t>14.04.2024</a:t>
+              <a:t>14.04.2025</a:t>
             </a:fld>
             <a:endParaRPr lang="tr-TR"/>
           </a:p>
@@ -2191,7 +2191,7 @@
           <a:p>
             <a:fld id="{26396F4E-1D0B-3F44-AA0F-A3430AE5742F}" type="datetimeFigureOut">
               <a:rPr lang="tr-TR" smtClean="0"/>
-              <a:t>14.04.2024</a:t>
+              <a:t>14.04.2025</a:t>
             </a:fld>
             <a:endParaRPr lang="tr-TR"/>
           </a:p>
@@ -2468,7 +2468,7 @@
           <a:p>
             <a:fld id="{26396F4E-1D0B-3F44-AA0F-A3430AE5742F}" type="datetimeFigureOut">
               <a:rPr lang="tr-TR" smtClean="0"/>
-              <a:t>14.04.2024</a:t>
+              <a:t>14.04.2025</a:t>
             </a:fld>
             <a:endParaRPr lang="tr-TR"/>
           </a:p>
@@ -2725,7 +2725,7 @@
           <a:p>
             <a:fld id="{26396F4E-1D0B-3F44-AA0F-A3430AE5742F}" type="datetimeFigureOut">
               <a:rPr lang="tr-TR" smtClean="0"/>
-              <a:t>14.04.2024</a:t>
+              <a:t>14.04.2025</a:t>
             </a:fld>
             <a:endParaRPr lang="tr-TR"/>
           </a:p>
@@ -2938,7 +2938,7 @@
           <a:p>
             <a:fld id="{26396F4E-1D0B-3F44-AA0F-A3430AE5742F}" type="datetimeFigureOut">
               <a:rPr lang="tr-TR" smtClean="0"/>
-              <a:t>14.04.2024</a:t>
+              <a:t>14.04.2025</a:t>
             </a:fld>
             <a:endParaRPr lang="tr-TR"/>
           </a:p>
@@ -8160,7 +8160,7 @@
         </p:nvSpPr>
         <p:spPr>
           <a:xfrm>
-            <a:off x="2156403" y="3912713"/>
+            <a:off x="2156403" y="4366010"/>
             <a:ext cx="4831194" cy="2126864"/>
           </a:xfrm>
           <a:prstGeom prst="rect">
@@ -8603,14 +8603,14 @@
           <p:nvPr>
             <p:extLst>
               <p:ext uri="{D42A27DB-BD31-4B8C-83A1-F6EECF244321}">
-                <p14:modId xmlns:p14="http://schemas.microsoft.com/office/powerpoint/2010/main" val="2348720869"/>
+                <p14:modId xmlns:p14="http://schemas.microsoft.com/office/powerpoint/2010/main" val="289118572"/>
               </p:ext>
             </p:extLst>
           </p:nvPr>
         </p:nvGraphicFramePr>
         <p:xfrm>
           <a:off x="3186905" y="2062642"/>
-          <a:ext cx="4484620" cy="1854200"/>
+          <a:ext cx="4484620" cy="2225040"/>
         </p:xfrm>
         <a:graphic>
           <a:graphicData uri="http://schemas.openxmlformats.org/drawingml/2006/table">
@@ -8655,7 +8655,7 @@
                     <a:lstStyle/>
                     <a:p>
                       <a:r>
-                        <a:rPr lang="en-TR" u="none" dirty="0"/>
+                        <a:rPr lang="en-TR" u="sng" dirty="0"/>
                         <a:t>ad</a:t>
                       </a:r>
                     </a:p>
@@ -8668,7 +8668,7 @@
                     <a:lstStyle/>
                     <a:p>
                       <a:r>
-                        <a:rPr lang="en-TR" u="none" dirty="0"/>
+                        <a:rPr lang="en-TR" u="sng" dirty="0"/>
                         <a:t>adres</a:t>
                       </a:r>
                     </a:p>
@@ -8681,23 +8681,27 @@
                     <a:lstStyle/>
                     <a:p>
                       <a:r>
-                        <a:rPr lang="en-TR" dirty="0"/>
-                        <a:t>ülkeKodu </a:t>
-                      </a:r>
-                    </a:p>
-                  </a:txBody>
-                  <a:tcPr/>
-                </a:tc>
-                <a:tc>
-                  <a:txBody>
-                    <a:bodyPr/>
-                    <a:lstStyle/>
-                    <a:p>
-                      <a:r>
-                        <a:rPr lang="en-US" dirty="0" err="1"/>
+                        <a:rPr lang="en-TR" u="sng" dirty="0"/>
+                        <a:t>ülkeKodu</a:t>
+                      </a:r>
+                      <a:r>
+                        <a:rPr lang="en-TR" dirty="0"/>
+                        <a:t> </a:t>
+                      </a:r>
+                    </a:p>
+                  </a:txBody>
+                  <a:tcPr/>
+                </a:tc>
+                <a:tc>
+                  <a:txBody>
+                    <a:bodyPr/>
+                    <a:lstStyle/>
+                    <a:p>
+                      <a:r>
+                        <a:rPr lang="en-US" u="sng" dirty="0" err="1"/>
                         <a:t>telefon</a:t>
                       </a:r>
-                      <a:endParaRPr lang="en-TR" dirty="0"/>
+                      <a:endParaRPr lang="en-TR" u="sng" dirty="0"/>
                     </a:p>
                   </a:txBody>
                   <a:tcPr/>
@@ -8941,6 +8945,82 @@
                 <a:extLst>
                   <a:ext uri="{0D108BD9-81ED-4DB2-BD59-A6C34878D82A}">
                     <a16:rowId xmlns:a16="http://schemas.microsoft.com/office/drawing/2014/main" val="3117025022"/>
+                  </a:ext>
+                </a:extLst>
+              </a:tr>
+              <a:tr h="370840">
+                <a:tc>
+                  <a:txBody>
+                    <a:bodyPr/>
+                    <a:lstStyle/>
+                    <a:p>
+                      <a:r>
+                        <a:rPr lang="en-TR" dirty="0"/>
+                        <a:t>Ayşe</a:t>
+                      </a:r>
+                    </a:p>
+                  </a:txBody>
+                  <a:tcPr/>
+                </a:tc>
+                <a:tc>
+                  <a:txBody>
+                    <a:bodyPr/>
+                    <a:lstStyle/>
+                    <a:p>
+                      <a:r>
+                        <a:rPr lang="en-TR" dirty="0"/>
+                        <a:t>Adres 3</a:t>
+                      </a:r>
+                    </a:p>
+                  </a:txBody>
+                  <a:tcPr/>
+                </a:tc>
+                <a:tc>
+                  <a:txBody>
+                    <a:bodyPr/>
+                    <a:lstStyle/>
+                    <a:p>
+                      <a:r>
+                        <a:rPr lang="en-TR" dirty="0"/>
+                        <a:t>90</a:t>
+                      </a:r>
+                    </a:p>
+                  </a:txBody>
+                  <a:tcPr/>
+                </a:tc>
+                <a:tc>
+                  <a:txBody>
+                    <a:bodyPr/>
+                    <a:lstStyle/>
+                    <a:p>
+                      <a:pPr marL="0" marR="0" lvl="0" indent="0" algn="l" defTabSz="914400" rtl="0" eaLnBrk="1" fontAlgn="auto" latinLnBrk="0" hangingPunct="1">
+                        <a:lnSpc>
+                          <a:spcPct val="100000"/>
+                        </a:lnSpc>
+                        <a:spcBef>
+                          <a:spcPts val="0"/>
+                        </a:spcBef>
+                        <a:spcAft>
+                          <a:spcPts val="0"/>
+                        </a:spcAft>
+                        <a:buClrTx/>
+                        <a:buSzTx/>
+                        <a:buFontTx/>
+                        <a:buNone/>
+                        <a:tabLst/>
+                        <a:defRPr/>
+                      </a:pPr>
+                      <a:r>
+                        <a:rPr lang="en-TR" dirty="0"/>
+                        <a:t>5054567891</a:t>
+                      </a:r>
+                    </a:p>
+                  </a:txBody>
+                  <a:tcPr/>
+                </a:tc>
+                <a:extLst>
+                  <a:ext uri="{0D108BD9-81ED-4DB2-BD59-A6C34878D82A}">
+                    <a16:rowId xmlns:a16="http://schemas.microsoft.com/office/drawing/2014/main" val="3948591271"/>
                   </a:ext>
                 </a:extLst>
               </a:tr>
